--- a/docs/slides/graphRAG3.pptx
+++ b/docs/slides/graphRAG3.pptx
@@ -5,10 +5,10 @@
     <p:sldMasterId id="2147483658" r:id="rId1"/>
   </p:sldMasterIdLst>
   <p:notesMasterIdLst>
-    <p:notesMasterId r:id="rId20"/>
+    <p:notesMasterId r:id="rId21"/>
   </p:notesMasterIdLst>
   <p:handoutMasterIdLst>
-    <p:handoutMasterId r:id="rId21"/>
+    <p:handoutMasterId r:id="rId22"/>
   </p:handoutMasterIdLst>
   <p:sldIdLst>
     <p:sldId id="275" r:id="rId2"/>
@@ -18,17 +18,18 @@
     <p:sldId id="310" r:id="rId6"/>
     <p:sldId id="311" r:id="rId7"/>
     <p:sldId id="304" r:id="rId8"/>
-    <p:sldId id="312" r:id="rId9"/>
-    <p:sldId id="313" r:id="rId10"/>
-    <p:sldId id="314" r:id="rId11"/>
-    <p:sldId id="318" r:id="rId12"/>
-    <p:sldId id="305" r:id="rId13"/>
-    <p:sldId id="315" r:id="rId14"/>
-    <p:sldId id="316" r:id="rId15"/>
-    <p:sldId id="317" r:id="rId16"/>
-    <p:sldId id="307" r:id="rId17"/>
-    <p:sldId id="308" r:id="rId18"/>
-    <p:sldId id="269" r:id="rId19"/>
+    <p:sldId id="319" r:id="rId9"/>
+    <p:sldId id="312" r:id="rId10"/>
+    <p:sldId id="313" r:id="rId11"/>
+    <p:sldId id="314" r:id="rId12"/>
+    <p:sldId id="318" r:id="rId13"/>
+    <p:sldId id="305" r:id="rId14"/>
+    <p:sldId id="315" r:id="rId15"/>
+    <p:sldId id="316" r:id="rId16"/>
+    <p:sldId id="317" r:id="rId17"/>
+    <p:sldId id="307" r:id="rId18"/>
+    <p:sldId id="308" r:id="rId19"/>
+    <p:sldId id="269" r:id="rId20"/>
   </p:sldIdLst>
   <p:sldSz cx="9144000" cy="6858000" type="screen4x3"/>
   <p:notesSz cx="6858000" cy="9144000"/>
@@ -3639,6 +3640,276 @@
         <p:cNvPr id="1" name="">
           <a:extLst>
             <a:ext uri="{FF2B5EF4-FFF2-40B4-BE49-F238E27FC236}">
+              <a16:creationId xmlns:a16="http://schemas.microsoft.com/office/drawing/2014/main" id="{000EB071-232E-4F7F-0047-71FEDC6DB923}"/>
+            </a:ext>
+          </a:extLst>
+        </p:cNvPr>
+        <p:cNvGrpSpPr/>
+        <p:nvPr/>
+      </p:nvGrpSpPr>
+      <p:grpSpPr>
+        <a:xfrm>
+          <a:off x="0" y="0"/>
+          <a:ext cx="0" cy="0"/>
+          <a:chOff x="0" y="0"/>
+          <a:chExt cx="0" cy="0"/>
+        </a:xfrm>
+      </p:grpSpPr>
+      <p:sp>
+        <p:nvSpPr>
+          <p:cNvPr id="2" name="Slide Number Placeholder 1">
+            <a:extLst>
+              <a:ext uri="{FF2B5EF4-FFF2-40B4-BE49-F238E27FC236}">
+                <a16:creationId xmlns:a16="http://schemas.microsoft.com/office/drawing/2014/main" id="{F959A8F7-6472-6C90-6384-F4A5C8F8ED16}"/>
+              </a:ext>
+            </a:extLst>
+          </p:cNvPr>
+          <p:cNvSpPr>
+            <a:spLocks noGrp="1"/>
+          </p:cNvSpPr>
+          <p:nvPr>
+            <p:ph type="sldNum" sz="quarter" idx="12"/>
+          </p:nvPr>
+        </p:nvSpPr>
+        <p:spPr/>
+        <p:txBody>
+          <a:bodyPr/>
+          <a:lstStyle/>
+          <a:p>
+            <a:fld id="{9EA0BE3B-158A-4EDF-80DC-E394A0D1600F}" type="slidenum">
+              <a:rPr lang="en-US" smtClean="0"/>
+              <a:pPr/>
+              <a:t>10</a:t>
+            </a:fld>
+            <a:endParaRPr lang="en-US"/>
+          </a:p>
+        </p:txBody>
+      </p:sp>
+      <p:sp>
+        <p:nvSpPr>
+          <p:cNvPr id="3" name="Title 2">
+            <a:extLst>
+              <a:ext uri="{FF2B5EF4-FFF2-40B4-BE49-F238E27FC236}">
+                <a16:creationId xmlns:a16="http://schemas.microsoft.com/office/drawing/2014/main" id="{9B65181C-1A3B-45BB-B623-40843AF207EB}"/>
+              </a:ext>
+            </a:extLst>
+          </p:cNvPr>
+          <p:cNvSpPr>
+            <a:spLocks noGrp="1"/>
+          </p:cNvSpPr>
+          <p:nvPr>
+            <p:ph type="title"/>
+          </p:nvPr>
+        </p:nvSpPr>
+        <p:spPr/>
+        <p:txBody>
+          <a:bodyPr/>
+          <a:lstStyle/>
+          <a:p>
+            <a:r>
+              <a:rPr lang="vi-VN" sz="2400"/>
+              <a:t>Light RAG – Phase 3</a:t>
+            </a:r>
+            <a:r>
+              <a:rPr lang="en-US" sz="2400"/>
+              <a:t> — QUERY &amp; RETRIEVAL</a:t>
+            </a:r>
+          </a:p>
+        </p:txBody>
+      </p:sp>
+      <p:sp>
+        <p:nvSpPr>
+          <p:cNvPr id="6" name="TextBox 5">
+            <a:extLst>
+              <a:ext uri="{FF2B5EF4-FFF2-40B4-BE49-F238E27FC236}">
+                <a16:creationId xmlns:a16="http://schemas.microsoft.com/office/drawing/2014/main" id="{E2EBAF4B-1282-B2E8-E6EB-42590A65F9BF}"/>
+              </a:ext>
+            </a:extLst>
+          </p:cNvPr>
+          <p:cNvSpPr txBox="1"/>
+          <p:nvPr/>
+        </p:nvSpPr>
+        <p:spPr>
+          <a:xfrm>
+            <a:off x="218114" y="1434518"/>
+            <a:ext cx="4353886" cy="4524315"/>
+          </a:xfrm>
+          <a:prstGeom prst="rect">
+            <a:avLst/>
+          </a:prstGeom>
+          <a:noFill/>
+        </p:spPr>
+        <p:txBody>
+          <a:bodyPr wrap="square" rtlCol="0">
+            <a:spAutoFit/>
+          </a:bodyPr>
+          <a:lstStyle/>
+          <a:p>
+            <a:pPr marL="285750" indent="-285750">
+              <a:buFontTx/>
+              <a:buChar char="-"/>
+            </a:pPr>
+            <a:r>
+              <a:rPr lang="en-US"/>
+              <a:t>Nhận User Query.</a:t>
+            </a:r>
+            <a:endParaRPr lang="vi-VN"/>
+          </a:p>
+          <a:p>
+            <a:pPr marL="285750" indent="-285750">
+              <a:buFontTx/>
+              <a:buChar char="-"/>
+            </a:pPr>
+            <a:r>
+              <a:rPr lang="en-US"/>
+              <a:t>Phân tích Query để xác định thông tin cần Retrieval.</a:t>
+            </a:r>
+            <a:endParaRPr lang="vi-VN"/>
+          </a:p>
+          <a:p>
+            <a:pPr marL="285750" indent="-285750">
+              <a:buFontTx/>
+              <a:buChar char="-"/>
+            </a:pPr>
+            <a:r>
+              <a:rPr lang="en-US"/>
+              <a:t>LightRAG hỗ trợ hai hướng Retrieval chính:</a:t>
+            </a:r>
+            <a:endParaRPr lang="vi-VN"/>
+          </a:p>
+          <a:p>
+            <a:pPr marL="742950" lvl="1" indent="-285750">
+              <a:buFontTx/>
+              <a:buChar char="-"/>
+            </a:pPr>
+            <a:r>
+              <a:rPr lang="en-US"/>
+              <a:t> Local Search</a:t>
+            </a:r>
+            <a:endParaRPr lang="vi-VN"/>
+          </a:p>
+          <a:p>
+            <a:pPr marL="1200150" lvl="2" indent="-285750">
+              <a:buFontTx/>
+              <a:buChar char="-"/>
+            </a:pPr>
+            <a:r>
+              <a:rPr lang="en-US"/>
+              <a:t>Tập trung vào Entity cụ thể.</a:t>
+            </a:r>
+            <a:endParaRPr lang="vi-VN"/>
+          </a:p>
+          <a:p>
+            <a:pPr marL="1200150" lvl="2" indent="-285750">
+              <a:buFontTx/>
+              <a:buChar char="-"/>
+            </a:pPr>
+            <a:r>
+              <a:rPr lang="en-US"/>
+              <a:t>Truy xuất Entity, Relation và thông tin lân cận.</a:t>
+            </a:r>
+            <a:endParaRPr lang="vi-VN"/>
+          </a:p>
+          <a:p>
+            <a:pPr marL="742950" lvl="1" indent="-285750">
+              <a:buFontTx/>
+              <a:buChar char="-"/>
+            </a:pPr>
+            <a:r>
+              <a:rPr lang="en-US"/>
+              <a:t>Global Search</a:t>
+            </a:r>
+            <a:endParaRPr lang="vi-VN"/>
+          </a:p>
+          <a:p>
+            <a:pPr marL="1200150" lvl="2" indent="-285750">
+              <a:buFontTx/>
+              <a:buChar char="-"/>
+            </a:pPr>
+            <a:r>
+              <a:rPr lang="en-US"/>
+              <a:t>Tập trung vào thông tin tổng quát.</a:t>
+            </a:r>
+            <a:endParaRPr lang="vi-VN"/>
+          </a:p>
+          <a:p>
+            <a:pPr marL="1200150" lvl="2" indent="-285750">
+              <a:buFontTx/>
+              <a:buChar char="-"/>
+            </a:pPr>
+            <a:r>
+              <a:rPr lang="en-US"/>
+              <a:t>Khai thác thông tin ở mức Graph / Community.</a:t>
+            </a:r>
+            <a:endParaRPr lang="vi-VN"/>
+          </a:p>
+          <a:p>
+            <a:pPr marL="285750" indent="-285750">
+              <a:buFontTx/>
+              <a:buChar char="-"/>
+            </a:pPr>
+            <a:r>
+              <a:rPr lang="en-US"/>
+              <a:t>Có thể kết hợp Graph Retrieval với Vector Retrieval để lấy Context phù hợp.</a:t>
+            </a:r>
+            <a:endParaRPr lang="vi-VN"/>
+          </a:p>
+        </p:txBody>
+      </p:sp>
+      <p:pic>
+        <p:nvPicPr>
+          <p:cNvPr id="7" name="Picture 6">
+            <a:extLst>
+              <a:ext uri="{FF2B5EF4-FFF2-40B4-BE49-F238E27FC236}">
+                <a16:creationId xmlns:a16="http://schemas.microsoft.com/office/drawing/2014/main" id="{2AC60FCD-2784-101B-DA9C-1382235F7FE7}"/>
+              </a:ext>
+            </a:extLst>
+          </p:cNvPr>
+          <p:cNvPicPr>
+            <a:picLocks noChangeAspect="1"/>
+          </p:cNvPicPr>
+          <p:nvPr/>
+        </p:nvPicPr>
+        <p:blipFill>
+          <a:blip r:embed="rId2"/>
+          <a:stretch>
+            <a:fillRect/>
+          </a:stretch>
+        </p:blipFill>
+        <p:spPr>
+          <a:xfrm>
+            <a:off x="4496500" y="1194143"/>
+            <a:ext cx="4194133" cy="4865193"/>
+          </a:xfrm>
+          <a:prstGeom prst="rect">
+            <a:avLst/>
+          </a:prstGeom>
+        </p:spPr>
+      </p:pic>
+    </p:spTree>
+    <p:extLst>
+      <p:ext uri="{BB962C8B-B14F-4D97-AF65-F5344CB8AC3E}">
+        <p14:creationId xmlns:p14="http://schemas.microsoft.com/office/powerpoint/2010/main" val="3333745403"/>
+      </p:ext>
+    </p:extLst>
+  </p:cSld>
+  <p:clrMapOvr>
+    <a:masterClrMapping/>
+  </p:clrMapOvr>
+  <p:transition spd="slow">
+    <p:push dir="u"/>
+  </p:transition>
+</p:sld>
+</file>
+
+<file path=ppt/slides/slide11.xml><?xml version="1.0" encoding="utf-8"?>
+<p:sld xmlns:a="http://schemas.openxmlformats.org/drawingml/2006/main" xmlns:r="http://schemas.openxmlformats.org/officeDocument/2006/relationships" xmlns:p="http://schemas.openxmlformats.org/presentationml/2006/main">
+  <p:cSld>
+    <p:spTree>
+      <p:nvGrpSpPr>
+        <p:cNvPr id="1" name="">
+          <a:extLst>
+            <a:ext uri="{FF2B5EF4-FFF2-40B4-BE49-F238E27FC236}">
               <a16:creationId xmlns:a16="http://schemas.microsoft.com/office/drawing/2014/main" id="{EB23A1DE-8610-9C32-F278-1E22C0A3FBFF}"/>
             </a:ext>
           </a:extLst>
@@ -3678,7 +3949,7 @@
             <a:fld id="{9EA0BE3B-158A-4EDF-80DC-E394A0D1600F}" type="slidenum">
               <a:rPr lang="en-US" smtClean="0"/>
               <a:pPr/>
-              <a:t>10</a:t>
+              <a:t>11</a:t>
             </a:fld>
             <a:endParaRPr lang="en-US"/>
           </a:p>
@@ -3824,7 +4095,7 @@
 </p:sld>
 </file>
 
-<file path=ppt/slides/slide11.xml><?xml version="1.0" encoding="utf-8"?>
+<file path=ppt/slides/slide12.xml><?xml version="1.0" encoding="utf-8"?>
 <p:sld xmlns:a="http://schemas.openxmlformats.org/drawingml/2006/main" xmlns:r="http://schemas.openxmlformats.org/officeDocument/2006/relationships" xmlns:p="http://schemas.openxmlformats.org/presentationml/2006/main">
   <p:cSld>
     <p:spTree>
@@ -3871,7 +4142,7 @@
             <a:fld id="{9EA0BE3B-158A-4EDF-80DC-E394A0D1600F}" type="slidenum">
               <a:rPr lang="en-US" smtClean="0"/>
               <a:pPr/>
-              <a:t>11</a:t>
+              <a:t>12</a:t>
             </a:fld>
             <a:endParaRPr lang="en-US"/>
           </a:p>
@@ -4330,7 +4601,7 @@
 </p:sld>
 </file>
 
-<file path=ppt/slides/slide12.xml><?xml version="1.0" encoding="utf-8"?>
+<file path=ppt/slides/slide13.xml><?xml version="1.0" encoding="utf-8"?>
 <p:sld xmlns:a="http://schemas.openxmlformats.org/drawingml/2006/main" xmlns:r="http://schemas.openxmlformats.org/officeDocument/2006/relationships" xmlns:p="http://schemas.openxmlformats.org/presentationml/2006/main">
   <p:cSld>
     <p:spTree>
@@ -4377,7 +4648,7 @@
             <a:fld id="{9EA0BE3B-158A-4EDF-80DC-E394A0D1600F}" type="slidenum">
               <a:rPr lang="en-US" smtClean="0"/>
               <a:pPr/>
-              <a:t>12</a:t>
+              <a:t>13</a:t>
             </a:fld>
             <a:endParaRPr lang="en-US"/>
           </a:p>
@@ -4458,7 +4729,7 @@
 </p:sld>
 </file>
 
-<file path=ppt/slides/slide13.xml><?xml version="1.0" encoding="utf-8"?>
+<file path=ppt/slides/slide14.xml><?xml version="1.0" encoding="utf-8"?>
 <p:sld xmlns:a="http://schemas.openxmlformats.org/drawingml/2006/main" xmlns:r="http://schemas.openxmlformats.org/officeDocument/2006/relationships" xmlns:p="http://schemas.openxmlformats.org/presentationml/2006/main">
   <p:cSld>
     <p:spTree>
@@ -4505,7 +4776,7 @@
             <a:fld id="{9EA0BE3B-158A-4EDF-80DC-E394A0D1600F}" type="slidenum">
               <a:rPr lang="en-US" smtClean="0"/>
               <a:pPr/>
-              <a:t>13</a:t>
+              <a:t>14</a:t>
             </a:fld>
             <a:endParaRPr lang="en-US"/>
           </a:p>
@@ -4586,7 +4857,7 @@
 </p:sld>
 </file>
 
-<file path=ppt/slides/slide14.xml><?xml version="1.0" encoding="utf-8"?>
+<file path=ppt/slides/slide15.xml><?xml version="1.0" encoding="utf-8"?>
 <p:sld xmlns:a="http://schemas.openxmlformats.org/drawingml/2006/main" xmlns:r="http://schemas.openxmlformats.org/officeDocument/2006/relationships" xmlns:p="http://schemas.openxmlformats.org/presentationml/2006/main">
   <p:cSld>
     <p:spTree>
@@ -4633,7 +4904,7 @@
             <a:fld id="{9EA0BE3B-158A-4EDF-80DC-E394A0D1600F}" type="slidenum">
               <a:rPr lang="en-US" smtClean="0"/>
               <a:pPr/>
-              <a:t>14</a:t>
+              <a:t>15</a:t>
             </a:fld>
             <a:endParaRPr lang="en-US"/>
           </a:p>
@@ -4714,7 +4985,7 @@
 </p:sld>
 </file>
 
-<file path=ppt/slides/slide15.xml><?xml version="1.0" encoding="utf-8"?>
+<file path=ppt/slides/slide16.xml><?xml version="1.0" encoding="utf-8"?>
 <p:sld xmlns:a="http://schemas.openxmlformats.org/drawingml/2006/main" xmlns:r="http://schemas.openxmlformats.org/officeDocument/2006/relationships" xmlns:p="http://schemas.openxmlformats.org/presentationml/2006/main">
   <p:cSld>
     <p:spTree>
@@ -4761,7 +5032,7 @@
             <a:fld id="{9EA0BE3B-158A-4EDF-80DC-E394A0D1600F}" type="slidenum">
               <a:rPr lang="en-US" smtClean="0"/>
               <a:pPr/>
-              <a:t>15</a:t>
+              <a:t>16</a:t>
             </a:fld>
             <a:endParaRPr lang="en-US"/>
           </a:p>
@@ -4842,7 +5113,7 @@
 </p:sld>
 </file>
 
-<file path=ppt/slides/slide16.xml><?xml version="1.0" encoding="utf-8"?>
+<file path=ppt/slides/slide17.xml><?xml version="1.0" encoding="utf-8"?>
 <p:sld xmlns:a="http://schemas.openxmlformats.org/drawingml/2006/main" xmlns:r="http://schemas.openxmlformats.org/officeDocument/2006/relationships" xmlns:p="http://schemas.openxmlformats.org/presentationml/2006/main">
   <p:cSld>
     <p:spTree>
@@ -4889,7 +5160,7 @@
             <a:fld id="{9EA0BE3B-158A-4EDF-80DC-E394A0D1600F}" type="slidenum">
               <a:rPr lang="en-US" smtClean="0"/>
               <a:pPr/>
-              <a:t>16</a:t>
+              <a:t>17</a:t>
             </a:fld>
             <a:endParaRPr lang="en-US"/>
           </a:p>
@@ -4970,7 +5241,7 @@
 </p:sld>
 </file>
 
-<file path=ppt/slides/slide17.xml><?xml version="1.0" encoding="utf-8"?>
+<file path=ppt/slides/slide18.xml><?xml version="1.0" encoding="utf-8"?>
 <p:sld xmlns:a="http://schemas.openxmlformats.org/drawingml/2006/main" xmlns:r="http://schemas.openxmlformats.org/officeDocument/2006/relationships" xmlns:p="http://schemas.openxmlformats.org/presentationml/2006/main">
   <p:cSld>
     <p:spTree>
@@ -5017,7 +5288,7 @@
             <a:fld id="{9EA0BE3B-158A-4EDF-80DC-E394A0D1600F}" type="slidenum">
               <a:rPr lang="en-US" smtClean="0"/>
               <a:pPr/>
-              <a:t>17</a:t>
+              <a:t>18</a:t>
             </a:fld>
             <a:endParaRPr lang="en-US"/>
           </a:p>
@@ -5067,13 +5338,13 @@
           <p:nvPr>
             <p:extLst>
               <p:ext uri="{D42A27DB-BD31-4B8C-83A1-F6EECF244321}">
-                <p14:modId xmlns:p14="http://schemas.microsoft.com/office/powerpoint/2010/main" val="1024951478"/>
+                <p14:modId xmlns:p14="http://schemas.microsoft.com/office/powerpoint/2010/main" val="969221437"/>
               </p:ext>
             </p:extLst>
           </p:nvPr>
         </p:nvGraphicFramePr>
         <p:xfrm>
-          <a:off x="771383" y="927347"/>
+          <a:off x="1150257" y="828321"/>
           <a:ext cx="6096000" cy="1381760"/>
         </p:xfrm>
         <a:graphic>
@@ -5456,7 +5727,7 @@
               <a:t>QUERYING</a:t>
             </a:r>
             <a:r>
-              <a:rPr lang="vi-VN" sz="1800"/>
+              <a:rPr lang="vi-VN"/>
               <a:t>:</a:t>
             </a:r>
           </a:p>
@@ -5466,15 +5737,15 @@
               <a:buChar char="-"/>
             </a:pPr>
             <a:r>
-              <a:rPr lang="vi-VN" sz="1800"/>
+              <a:rPr lang="vi-VN"/>
               <a:t>Microsoft GraphRAG</a:t>
             </a:r>
             <a:r>
-              <a:rPr lang="en-US" sz="1800"/>
+              <a:rPr lang="en-US"/>
               <a:t> tốn nhiều token hơn</a:t>
             </a:r>
             <a:r>
-              <a:rPr lang="vi-VN" sz="1800"/>
+              <a:rPr lang="vi-VN"/>
               <a:t> do:</a:t>
             </a:r>
           </a:p>
@@ -5495,7 +5766,6 @@
               <a:rPr lang="en-US"/>
               <a:t>.</a:t>
             </a:r>
-            <a:endParaRPr lang="en-US" sz="1800"/>
           </a:p>
         </p:txBody>
       </p:sp>
@@ -5514,7 +5784,7 @@
         <p:spPr>
           <a:xfrm>
             <a:off x="510709" y="4357943"/>
-            <a:ext cx="8044821" cy="1200329"/>
+            <a:ext cx="8044821" cy="1477328"/>
           </a:xfrm>
           <a:prstGeom prst="rect">
             <a:avLst/>
@@ -5529,35 +5799,7 @@
           <a:p>
             <a:r>
               <a:rPr lang="vi-VN"/>
-              <a:t>Tổng kết: </a:t>
-            </a:r>
-            <a:r>
-              <a:rPr lang="en-US"/>
-              <a:t>LightRAG rẻ hơn tổng thể trong kịch bản test này (</a:t>
-            </a:r>
-            <a:r>
-              <a:rPr lang="vi-VN"/>
-              <a:t>6</a:t>
-            </a:r>
-            <a:r>
-              <a:rPr lang="en-US"/>
-              <a:t>0 câu, graph mới build). Nhưng phần chi phí cao của GraphRAG đến từ việc build community </a:t>
-            </a:r>
-            <a:r>
-              <a:rPr lang="vi-VN"/>
-              <a:t>summary, </a:t>
-            </a:r>
-            <a:r>
-              <a:rPr lang="en-US"/>
-              <a:t>một khoản one-time cost</a:t>
-            </a:r>
-            <a:r>
-              <a:rPr lang="vi-VN"/>
-              <a:t> đã</a:t>
-            </a:r>
-            <a:r>
-              <a:rPr lang="en-US"/>
-              <a:t> được cache lại, nên với số lượng câu hỏi lớn hơn nhiều, khoảng cách này có thể thu hẹp</a:t>
+              <a:t>Tổng kết: LightRAG rẻ hơn tổng thể trong kịch bản test này (60 câu, graph mới build). Nhưng phần chi phí cao của Microsoft GraphRAG đến từ việc build community summary, một khoản one-time cost đã được cache lại, nên với số lượng câu hỏi lớn hơn của cùng bộ tài liệu này, Microsoft graph rag có thể rẻ hơn</a:t>
             </a:r>
           </a:p>
         </p:txBody>
@@ -5578,7 +5820,7 @@
 </p:sld>
 </file>
 
-<file path=ppt/slides/slide18.xml><?xml version="1.0" encoding="utf-8"?>
+<file path=ppt/slides/slide19.xml><?xml version="1.0" encoding="utf-8"?>
 <p:sld xmlns:a="http://schemas.openxmlformats.org/drawingml/2006/main" xmlns:r="http://schemas.openxmlformats.org/officeDocument/2006/relationships" xmlns:p="http://schemas.openxmlformats.org/presentationml/2006/main">
   <p:cSld>
     <p:spTree>
@@ -5619,7 +5861,7 @@
             <a:fld id="{9EA0BE3B-158A-4EDF-80DC-E394A0D1600F}" type="slidenum">
               <a:rPr lang="en-US" smtClean="0"/>
               <a:pPr/>
-              <a:t>18</a:t>
+              <a:t>19</a:t>
             </a:fld>
             <a:endParaRPr lang="en-US"/>
           </a:p>
@@ -7120,6 +7362,42 @@
           <a:chExt cx="0" cy="0"/>
         </a:xfrm>
       </p:grpSpPr>
+      <p:pic>
+        <p:nvPicPr>
+          <p:cNvPr id="12" name="Picture 11">
+            <a:extLst>
+              <a:ext uri="{FF2B5EF4-FFF2-40B4-BE49-F238E27FC236}">
+                <a16:creationId xmlns:a16="http://schemas.microsoft.com/office/drawing/2014/main" id="{3D7CD2F5-E22A-B1D6-3613-3C70E2E52C0B}"/>
+              </a:ext>
+            </a:extLst>
+          </p:cNvPr>
+          <p:cNvPicPr>
+            <a:picLocks noChangeAspect="1"/>
+          </p:cNvPicPr>
+          <p:nvPr/>
+        </p:nvPicPr>
+        <p:blipFill>
+          <a:blip r:embed="rId2">
+            <a:extLst>
+              <a:ext uri="{28A0092B-C50C-407E-A947-70E740481C1C}">
+                <a14:useLocalDpi xmlns:a14="http://schemas.microsoft.com/office/drawing/2010/main" val="0"/>
+              </a:ext>
+            </a:extLst>
+          </a:blip>
+          <a:stretch>
+            <a:fillRect/>
+          </a:stretch>
+        </p:blipFill>
+        <p:spPr>
+          <a:xfrm>
+            <a:off x="3651633" y="1517902"/>
+            <a:ext cx="5409119" cy="4066674"/>
+          </a:xfrm>
+          <a:prstGeom prst="rect">
+            <a:avLst/>
+          </a:prstGeom>
+        </p:spPr>
+      </p:pic>
       <p:sp>
         <p:nvSpPr>
           <p:cNvPr id="2" name="Slide Number Placeholder 1">
@@ -7177,8 +7455,13 @@
             </a:r>
             <a:r>
               <a:rPr lang="en-US"/>
-              <a:t> INDEXING</a:t>
-            </a:r>
+              <a:t> </a:t>
+            </a:r>
+            <a:r>
+              <a:rPr lang="vi-VN"/>
+              <a:t>Overview</a:t>
+            </a:r>
+            <a:endParaRPr lang="en-US"/>
           </a:p>
         </p:txBody>
       </p:sp>
@@ -7196,8 +7479,8 @@
         </p:nvSpPr>
         <p:spPr>
           <a:xfrm>
-            <a:off x="0" y="1669409"/>
-            <a:ext cx="4353886" cy="3139321"/>
+            <a:off x="0" y="1997839"/>
+            <a:ext cx="3810000" cy="3693319"/>
           </a:xfrm>
           <a:prstGeom prst="rect">
             <a:avLst/>
@@ -7215,38 +7498,187 @@
               <a:buChar char="-"/>
             </a:pPr>
             <a:r>
-              <a:rPr lang="en-US"/>
-              <a:t>Đọc tài liệu đầu vào và chia thành các Chunk.</a:t>
-            </a:r>
-            <a:endParaRPr lang="vi-VN"/>
+              <a:rPr lang="vi-VN"/>
+              <a:t>LightRAG là một kiến trúc Graph RAG kết hợp:</a:t>
+            </a:r>
+          </a:p>
+          <a:p>
+            <a:pPr marL="742950" lvl="1" indent="-285750">
+              <a:buFontTx/>
+              <a:buChar char="-"/>
+            </a:pPr>
+            <a:r>
+              <a:rPr lang="vi-VN"/>
+              <a:t>Knowledge Graph: biểu diễn Entities và Relations.</a:t>
+            </a:r>
+          </a:p>
+          <a:p>
+            <a:pPr marL="742950" lvl="1" indent="-285750">
+              <a:buFontTx/>
+              <a:buChar char="-"/>
+            </a:pPr>
+            <a:r>
+              <a:rPr lang="vi-VN"/>
+              <a:t>Vector Embeddings: hỗ trợ Semantic Retrieval.</a:t>
+            </a:r>
+          </a:p>
+          <a:p>
+            <a:pPr marL="742950" lvl="1" indent="-285750">
+              <a:buFontTx/>
+              <a:buChar char="-"/>
+            </a:pPr>
+            <a:r>
+              <a:rPr lang="vi-VN"/>
+              <a:t>Local Search: truy xuất thông tin xoay quanh Entity cụ thể.</a:t>
+            </a:r>
+          </a:p>
+          <a:p>
+            <a:pPr marL="742950" lvl="1" indent="-285750">
+              <a:buFontTx/>
+              <a:buChar char="-"/>
+            </a:pPr>
+            <a:r>
+              <a:rPr lang="vi-VN"/>
+              <a:t>Global Search: truy xuất thông tin ở phạm vi rộng hơn.</a:t>
+            </a:r>
           </a:p>
           <a:p>
             <a:pPr marL="285750" indent="-285750">
               <a:buFontTx/>
               <a:buChar char="-"/>
             </a:pPr>
+            <a:endParaRPr lang="vi-VN"/>
+          </a:p>
+        </p:txBody>
+      </p:sp>
+    </p:spTree>
+    <p:extLst>
+      <p:ext uri="{BB962C8B-B14F-4D97-AF65-F5344CB8AC3E}">
+        <p14:creationId xmlns:p14="http://schemas.microsoft.com/office/powerpoint/2010/main" val="4120691591"/>
+      </p:ext>
+    </p:extLst>
+  </p:cSld>
+  <p:clrMapOvr>
+    <a:masterClrMapping/>
+  </p:clrMapOvr>
+  <p:transition spd="slow">
+    <p:push dir="u"/>
+  </p:transition>
+</p:sld>
+</file>
+
+<file path=ppt/slides/slide8.xml><?xml version="1.0" encoding="utf-8"?>
+<p:sld xmlns:a="http://schemas.openxmlformats.org/drawingml/2006/main" xmlns:r="http://schemas.openxmlformats.org/officeDocument/2006/relationships" xmlns:p="http://schemas.openxmlformats.org/presentationml/2006/main">
+  <p:cSld>
+    <p:spTree>
+      <p:nvGrpSpPr>
+        <p:cNvPr id="1" name="">
+          <a:extLst>
+            <a:ext uri="{FF2B5EF4-FFF2-40B4-BE49-F238E27FC236}">
+              <a16:creationId xmlns:a16="http://schemas.microsoft.com/office/drawing/2014/main" id="{31E3DAB8-5AA7-AEB8-F9F9-E1D5AD60E1E0}"/>
+            </a:ext>
+          </a:extLst>
+        </p:cNvPr>
+        <p:cNvGrpSpPr/>
+        <p:nvPr/>
+      </p:nvGrpSpPr>
+      <p:grpSpPr>
+        <a:xfrm>
+          <a:off x="0" y="0"/>
+          <a:ext cx="0" cy="0"/>
+          <a:chOff x="0" y="0"/>
+          <a:chExt cx="0" cy="0"/>
+        </a:xfrm>
+      </p:grpSpPr>
+      <p:sp>
+        <p:nvSpPr>
+          <p:cNvPr id="2" name="Slide Number Placeholder 1">
+            <a:extLst>
+              <a:ext uri="{FF2B5EF4-FFF2-40B4-BE49-F238E27FC236}">
+                <a16:creationId xmlns:a16="http://schemas.microsoft.com/office/drawing/2014/main" id="{753D70C8-D2A3-9E00-5934-7394DBC61EED}"/>
+              </a:ext>
+            </a:extLst>
+          </p:cNvPr>
+          <p:cNvSpPr>
+            <a:spLocks noGrp="1"/>
+          </p:cNvSpPr>
+          <p:nvPr>
+            <p:ph type="sldNum" sz="quarter" idx="12"/>
+          </p:nvPr>
+        </p:nvSpPr>
+        <p:spPr/>
+        <p:txBody>
+          <a:bodyPr/>
+          <a:lstStyle/>
+          <a:p>
+            <a:fld id="{9EA0BE3B-158A-4EDF-80DC-E394A0D1600F}" type="slidenum">
+              <a:rPr lang="en-US" smtClean="0"/>
+              <a:pPr/>
+              <a:t>8</a:t>
+            </a:fld>
+            <a:endParaRPr lang="en-US"/>
+          </a:p>
+        </p:txBody>
+      </p:sp>
+      <p:sp>
+        <p:nvSpPr>
+          <p:cNvPr id="3" name="Title 2">
+            <a:extLst>
+              <a:ext uri="{FF2B5EF4-FFF2-40B4-BE49-F238E27FC236}">
+                <a16:creationId xmlns:a16="http://schemas.microsoft.com/office/drawing/2014/main" id="{D0337B36-7A00-5FF5-9FF5-AD6DCC8BD158}"/>
+              </a:ext>
+            </a:extLst>
+          </p:cNvPr>
+          <p:cNvSpPr>
+            <a:spLocks noGrp="1"/>
+          </p:cNvSpPr>
+          <p:nvPr>
+            <p:ph type="title"/>
+          </p:nvPr>
+        </p:nvSpPr>
+        <p:spPr/>
+        <p:txBody>
+          <a:bodyPr/>
+          <a:lstStyle/>
+          <a:p>
+            <a:r>
+              <a:rPr lang="vi-VN"/>
+              <a:t>Light RAG – Phase 1 -</a:t>
+            </a:r>
             <a:r>
               <a:rPr lang="en-US"/>
-              <a:t>Sử dụng LLM để Extract: </a:t>
-            </a:r>
-            <a:r>
-              <a:rPr lang="vi-VN"/>
-              <a:t>Entities, Relations, </a:t>
-            </a:r>
-            <a:r>
-              <a:rPr lang="en-US"/>
-              <a:t>Entity de</a:t>
-            </a:r>
-            <a:r>
-              <a:rPr lang="vi-VN"/>
-              <a:t>scriptions, </a:t>
-            </a:r>
-            <a:r>
-              <a:rPr lang="en-US"/>
-              <a:t>Relation descriptions</a:t>
-            </a:r>
-            <a:endParaRPr lang="vi-VN"/>
-          </a:p>
+              <a:t> INDEXING</a:t>
+            </a:r>
+          </a:p>
+        </p:txBody>
+      </p:sp>
+      <p:sp>
+        <p:nvSpPr>
+          <p:cNvPr id="6" name="TextBox 5">
+            <a:extLst>
+              <a:ext uri="{FF2B5EF4-FFF2-40B4-BE49-F238E27FC236}">
+                <a16:creationId xmlns:a16="http://schemas.microsoft.com/office/drawing/2014/main" id="{21F3AD05-F2CF-58AE-D7A8-254D6C81E7A6}"/>
+              </a:ext>
+            </a:extLst>
+          </p:cNvPr>
+          <p:cNvSpPr txBox="1"/>
+          <p:nvPr/>
+        </p:nvSpPr>
+        <p:spPr>
+          <a:xfrm>
+            <a:off x="128337" y="933659"/>
+            <a:ext cx="4353886" cy="5355312"/>
+          </a:xfrm>
+          <a:prstGeom prst="rect">
+            <a:avLst/>
+          </a:prstGeom>
+          <a:noFill/>
+        </p:spPr>
+        <p:txBody>
+          <a:bodyPr wrap="square" rtlCol="0">
+            <a:spAutoFit/>
+          </a:bodyPr>
+          <a:lstStyle/>
           <a:p>
             <a:pPr marL="285750" indent="-285750">
               <a:buFontTx/>
@@ -7254,12 +7686,9 @@
             </a:pPr>
             <a:r>
               <a:rPr lang="en-US"/>
-              <a:t>Xây dựng Knowledge Graph từ các Entity và Relation.</a:t>
-            </a:r>
-            <a:r>
-              <a:rPr lang="vi-VN"/>
-              <a:t> </a:t>
-            </a:r>
+              <a:t>Đọc tài liệu đầu vào và chia thành các Chunk.</a:t>
+            </a:r>
+            <a:endParaRPr lang="vi-VN"/>
           </a:p>
           <a:p>
             <a:pPr marL="285750" indent="-285750">
@@ -7267,28 +7696,24 @@
               <a:buChar char="-"/>
             </a:pPr>
             <a:r>
+              <a:rPr lang="en-US"/>
+              <a:t>Sử dụng LLM để Extract: </a:t>
+            </a:r>
+            <a:r>
               <a:rPr lang="vi-VN"/>
-              <a:t>Đ</a:t>
+              <a:t>Entities, Relations, </a:t>
             </a:r>
             <a:r>
               <a:rPr lang="en-US"/>
-              <a:t>ồng thời tạo Vector Embeddings cho:</a:t>
+              <a:t>Entity de</a:t>
             </a:r>
             <a:r>
               <a:rPr lang="vi-VN"/>
-              <a:t> Entitie,</a:t>
+              <a:t>scriptions, </a:t>
             </a:r>
             <a:r>
               <a:rPr lang="en-US"/>
-              <a:t> </a:t>
-            </a:r>
-            <a:r>
-              <a:rPr lang="vi-VN"/>
-              <a:t>Relations, </a:t>
-            </a:r>
-            <a:r>
-              <a:rPr lang="en-US"/>
-              <a:t>Chunks</a:t>
+              <a:t>Relation descriptions</a:t>
             </a:r>
             <a:endParaRPr lang="vi-VN"/>
           </a:p>
@@ -7299,6 +7724,51 @@
             </a:pPr>
             <a:r>
               <a:rPr lang="en-US"/>
+              <a:t>Xây dựng Knowledge Graph từ các Entity và Relation.</a:t>
+            </a:r>
+            <a:r>
+              <a:rPr lang="vi-VN"/>
+              <a:t> Tổng kết: LightRAG rẻ hơn tổng thể trong kịch bản test này (60 câu, graph mới build). Nhưng phần chi phí cao của Microsoft GraphRAG đến từ việc build community summary, một khoản one-time cost đã được cache lại, nên với số lượng câu hỏi lớn hơn của cùng bộ tài liệu này, Microsoft graph rag có thể rẻ hơn </a:t>
+            </a:r>
+          </a:p>
+          <a:p>
+            <a:pPr marL="285750" indent="-285750">
+              <a:buFontTx/>
+              <a:buChar char="-"/>
+            </a:pPr>
+            <a:r>
+              <a:rPr lang="vi-VN"/>
+              <a:t>Đ</a:t>
+            </a:r>
+            <a:r>
+              <a:rPr lang="en-US"/>
+              <a:t>ồng thời tạo Vector Embeddings cho:</a:t>
+            </a:r>
+            <a:r>
+              <a:rPr lang="vi-VN"/>
+              <a:t> Entitie,</a:t>
+            </a:r>
+            <a:r>
+              <a:rPr lang="en-US"/>
+              <a:t> </a:t>
+            </a:r>
+            <a:r>
+              <a:rPr lang="vi-VN"/>
+              <a:t>Relations, </a:t>
+            </a:r>
+            <a:r>
+              <a:rPr lang="en-US"/>
+              <a:t>Chunks</a:t>
+            </a:r>
+            <a:endParaRPr lang="vi-VN"/>
+          </a:p>
+          <a:p>
+            <a:pPr marL="285750" indent="-285750">
+              <a:buFontTx/>
+              <a:buChar char="-"/>
+            </a:pPr>
+            <a:r>
+              <a:rPr lang="en-US"/>
               <a:t>Lưu Graph + Vector Index để phục vụ Retrieval.</a:t>
             </a:r>
             <a:endParaRPr lang="vi-VN"/>
@@ -7310,7 +7780,7 @@
           <p:cNvPr id="10" name="Picture 9">
             <a:extLst>
               <a:ext uri="{FF2B5EF4-FFF2-40B4-BE49-F238E27FC236}">
-                <a16:creationId xmlns:a16="http://schemas.microsoft.com/office/drawing/2014/main" id="{DBD63838-B1F4-E46A-845B-20CCCD8B22EA}"/>
+                <a16:creationId xmlns:a16="http://schemas.microsoft.com/office/drawing/2014/main" id="{85C64837-3C99-2C13-CD0C-9F1185594F9F}"/>
               </a:ext>
             </a:extLst>
           </p:cNvPr>
@@ -7338,7 +7808,7 @@
     </p:spTree>
     <p:extLst>
       <p:ext uri="{BB962C8B-B14F-4D97-AF65-F5344CB8AC3E}">
-        <p14:creationId xmlns:p14="http://schemas.microsoft.com/office/powerpoint/2010/main" val="4120691591"/>
+        <p14:creationId xmlns:p14="http://schemas.microsoft.com/office/powerpoint/2010/main" val="298179720"/>
       </p:ext>
     </p:extLst>
   </p:cSld>
@@ -7351,7 +7821,7 @@
 </p:sld>
 </file>
 
-<file path=ppt/slides/slide8.xml><?xml version="1.0" encoding="utf-8"?>
+<file path=ppt/slides/slide9.xml><?xml version="1.0" encoding="utf-8"?>
 <p:sld xmlns:a="http://schemas.openxmlformats.org/drawingml/2006/main" xmlns:r="http://schemas.openxmlformats.org/officeDocument/2006/relationships" xmlns:p="http://schemas.openxmlformats.org/presentationml/2006/main">
   <p:cSld>
     <p:spTree>
@@ -7398,7 +7868,7 @@
             <a:fld id="{9EA0BE3B-158A-4EDF-80DC-E394A0D1600F}" type="slidenum">
               <a:rPr lang="en-US" smtClean="0"/>
               <a:pPr/>
-              <a:t>8</a:t>
+              <a:t>9</a:t>
             </a:fld>
             <a:endParaRPr lang="en-US"/>
           </a:p>
@@ -7543,276 +8013,6 @@
     <p:extLst>
       <p:ext uri="{BB962C8B-B14F-4D97-AF65-F5344CB8AC3E}">
         <p14:creationId xmlns:p14="http://schemas.microsoft.com/office/powerpoint/2010/main" val="828976404"/>
-      </p:ext>
-    </p:extLst>
-  </p:cSld>
-  <p:clrMapOvr>
-    <a:masterClrMapping/>
-  </p:clrMapOvr>
-  <p:transition spd="slow">
-    <p:push dir="u"/>
-  </p:transition>
-</p:sld>
-</file>
-
-<file path=ppt/slides/slide9.xml><?xml version="1.0" encoding="utf-8"?>
-<p:sld xmlns:a="http://schemas.openxmlformats.org/drawingml/2006/main" xmlns:r="http://schemas.openxmlformats.org/officeDocument/2006/relationships" xmlns:p="http://schemas.openxmlformats.org/presentationml/2006/main">
-  <p:cSld>
-    <p:spTree>
-      <p:nvGrpSpPr>
-        <p:cNvPr id="1" name="">
-          <a:extLst>
-            <a:ext uri="{FF2B5EF4-FFF2-40B4-BE49-F238E27FC236}">
-              <a16:creationId xmlns:a16="http://schemas.microsoft.com/office/drawing/2014/main" id="{000EB071-232E-4F7F-0047-71FEDC6DB923}"/>
-            </a:ext>
-          </a:extLst>
-        </p:cNvPr>
-        <p:cNvGrpSpPr/>
-        <p:nvPr/>
-      </p:nvGrpSpPr>
-      <p:grpSpPr>
-        <a:xfrm>
-          <a:off x="0" y="0"/>
-          <a:ext cx="0" cy="0"/>
-          <a:chOff x="0" y="0"/>
-          <a:chExt cx="0" cy="0"/>
-        </a:xfrm>
-      </p:grpSpPr>
-      <p:sp>
-        <p:nvSpPr>
-          <p:cNvPr id="2" name="Slide Number Placeholder 1">
-            <a:extLst>
-              <a:ext uri="{FF2B5EF4-FFF2-40B4-BE49-F238E27FC236}">
-                <a16:creationId xmlns:a16="http://schemas.microsoft.com/office/drawing/2014/main" id="{F959A8F7-6472-6C90-6384-F4A5C8F8ED16}"/>
-              </a:ext>
-            </a:extLst>
-          </p:cNvPr>
-          <p:cNvSpPr>
-            <a:spLocks noGrp="1"/>
-          </p:cNvSpPr>
-          <p:nvPr>
-            <p:ph type="sldNum" sz="quarter" idx="12"/>
-          </p:nvPr>
-        </p:nvSpPr>
-        <p:spPr/>
-        <p:txBody>
-          <a:bodyPr/>
-          <a:lstStyle/>
-          <a:p>
-            <a:fld id="{9EA0BE3B-158A-4EDF-80DC-E394A0D1600F}" type="slidenum">
-              <a:rPr lang="en-US" smtClean="0"/>
-              <a:pPr/>
-              <a:t>9</a:t>
-            </a:fld>
-            <a:endParaRPr lang="en-US"/>
-          </a:p>
-        </p:txBody>
-      </p:sp>
-      <p:sp>
-        <p:nvSpPr>
-          <p:cNvPr id="3" name="Title 2">
-            <a:extLst>
-              <a:ext uri="{FF2B5EF4-FFF2-40B4-BE49-F238E27FC236}">
-                <a16:creationId xmlns:a16="http://schemas.microsoft.com/office/drawing/2014/main" id="{9B65181C-1A3B-45BB-B623-40843AF207EB}"/>
-              </a:ext>
-            </a:extLst>
-          </p:cNvPr>
-          <p:cNvSpPr>
-            <a:spLocks noGrp="1"/>
-          </p:cNvSpPr>
-          <p:nvPr>
-            <p:ph type="title"/>
-          </p:nvPr>
-        </p:nvSpPr>
-        <p:spPr/>
-        <p:txBody>
-          <a:bodyPr/>
-          <a:lstStyle/>
-          <a:p>
-            <a:r>
-              <a:rPr lang="vi-VN" sz="2400"/>
-              <a:t>Light RAG – Phase 3</a:t>
-            </a:r>
-            <a:r>
-              <a:rPr lang="en-US" sz="2400"/>
-              <a:t> — QUERY &amp; RETRIEVAL</a:t>
-            </a:r>
-          </a:p>
-        </p:txBody>
-      </p:sp>
-      <p:sp>
-        <p:nvSpPr>
-          <p:cNvPr id="6" name="TextBox 5">
-            <a:extLst>
-              <a:ext uri="{FF2B5EF4-FFF2-40B4-BE49-F238E27FC236}">
-                <a16:creationId xmlns:a16="http://schemas.microsoft.com/office/drawing/2014/main" id="{E2EBAF4B-1282-B2E8-E6EB-42590A65F9BF}"/>
-              </a:ext>
-            </a:extLst>
-          </p:cNvPr>
-          <p:cNvSpPr txBox="1"/>
-          <p:nvPr/>
-        </p:nvSpPr>
-        <p:spPr>
-          <a:xfrm>
-            <a:off x="218114" y="1434518"/>
-            <a:ext cx="4353886" cy="4524315"/>
-          </a:xfrm>
-          <a:prstGeom prst="rect">
-            <a:avLst/>
-          </a:prstGeom>
-          <a:noFill/>
-        </p:spPr>
-        <p:txBody>
-          <a:bodyPr wrap="square" rtlCol="0">
-            <a:spAutoFit/>
-          </a:bodyPr>
-          <a:lstStyle/>
-          <a:p>
-            <a:pPr marL="285750" indent="-285750">
-              <a:buFontTx/>
-              <a:buChar char="-"/>
-            </a:pPr>
-            <a:r>
-              <a:rPr lang="en-US"/>
-              <a:t>Nhận User Query.</a:t>
-            </a:r>
-            <a:endParaRPr lang="vi-VN"/>
-          </a:p>
-          <a:p>
-            <a:pPr marL="285750" indent="-285750">
-              <a:buFontTx/>
-              <a:buChar char="-"/>
-            </a:pPr>
-            <a:r>
-              <a:rPr lang="en-US"/>
-              <a:t>Phân tích Query để xác định thông tin cần Retrieval.</a:t>
-            </a:r>
-            <a:endParaRPr lang="vi-VN"/>
-          </a:p>
-          <a:p>
-            <a:pPr marL="285750" indent="-285750">
-              <a:buFontTx/>
-              <a:buChar char="-"/>
-            </a:pPr>
-            <a:r>
-              <a:rPr lang="en-US"/>
-              <a:t>LightRAG hỗ trợ hai hướng Retrieval chính:</a:t>
-            </a:r>
-            <a:endParaRPr lang="vi-VN"/>
-          </a:p>
-          <a:p>
-            <a:pPr marL="742950" lvl="1" indent="-285750">
-              <a:buFontTx/>
-              <a:buChar char="-"/>
-            </a:pPr>
-            <a:r>
-              <a:rPr lang="en-US"/>
-              <a:t> Local Search</a:t>
-            </a:r>
-            <a:endParaRPr lang="vi-VN"/>
-          </a:p>
-          <a:p>
-            <a:pPr marL="1200150" lvl="2" indent="-285750">
-              <a:buFontTx/>
-              <a:buChar char="-"/>
-            </a:pPr>
-            <a:r>
-              <a:rPr lang="en-US"/>
-              <a:t>Tập trung vào Entity cụ thể.</a:t>
-            </a:r>
-            <a:endParaRPr lang="vi-VN"/>
-          </a:p>
-          <a:p>
-            <a:pPr marL="1200150" lvl="2" indent="-285750">
-              <a:buFontTx/>
-              <a:buChar char="-"/>
-            </a:pPr>
-            <a:r>
-              <a:rPr lang="en-US"/>
-              <a:t>Truy xuất Entity, Relation và thông tin lân cận.</a:t>
-            </a:r>
-            <a:endParaRPr lang="vi-VN"/>
-          </a:p>
-          <a:p>
-            <a:pPr marL="742950" lvl="1" indent="-285750">
-              <a:buFontTx/>
-              <a:buChar char="-"/>
-            </a:pPr>
-            <a:r>
-              <a:rPr lang="en-US"/>
-              <a:t>Global Search</a:t>
-            </a:r>
-            <a:endParaRPr lang="vi-VN"/>
-          </a:p>
-          <a:p>
-            <a:pPr marL="1200150" lvl="2" indent="-285750">
-              <a:buFontTx/>
-              <a:buChar char="-"/>
-            </a:pPr>
-            <a:r>
-              <a:rPr lang="en-US"/>
-              <a:t>Tập trung vào thông tin tổng quát.</a:t>
-            </a:r>
-            <a:endParaRPr lang="vi-VN"/>
-          </a:p>
-          <a:p>
-            <a:pPr marL="1200150" lvl="2" indent="-285750">
-              <a:buFontTx/>
-              <a:buChar char="-"/>
-            </a:pPr>
-            <a:r>
-              <a:rPr lang="en-US"/>
-              <a:t>Khai thác thông tin ở mức Graph / Community.</a:t>
-            </a:r>
-            <a:endParaRPr lang="vi-VN"/>
-          </a:p>
-          <a:p>
-            <a:pPr marL="285750" indent="-285750">
-              <a:buFontTx/>
-              <a:buChar char="-"/>
-            </a:pPr>
-            <a:r>
-              <a:rPr lang="en-US"/>
-              <a:t>Có thể kết hợp Graph Retrieval với Vector Retrieval để lấy Context phù hợp.</a:t>
-            </a:r>
-            <a:endParaRPr lang="vi-VN"/>
-          </a:p>
-        </p:txBody>
-      </p:sp>
-      <p:pic>
-        <p:nvPicPr>
-          <p:cNvPr id="7" name="Picture 6">
-            <a:extLst>
-              <a:ext uri="{FF2B5EF4-FFF2-40B4-BE49-F238E27FC236}">
-                <a16:creationId xmlns:a16="http://schemas.microsoft.com/office/drawing/2014/main" id="{2AC60FCD-2784-101B-DA9C-1382235F7FE7}"/>
-              </a:ext>
-            </a:extLst>
-          </p:cNvPr>
-          <p:cNvPicPr>
-            <a:picLocks noChangeAspect="1"/>
-          </p:cNvPicPr>
-          <p:nvPr/>
-        </p:nvPicPr>
-        <p:blipFill>
-          <a:blip r:embed="rId2"/>
-          <a:stretch>
-            <a:fillRect/>
-          </a:stretch>
-        </p:blipFill>
-        <p:spPr>
-          <a:xfrm>
-            <a:off x="4496500" y="1194143"/>
-            <a:ext cx="4194133" cy="4865193"/>
-          </a:xfrm>
-          <a:prstGeom prst="rect">
-            <a:avLst/>
-          </a:prstGeom>
-        </p:spPr>
-      </p:pic>
-    </p:spTree>
-    <p:extLst>
-      <p:ext uri="{BB962C8B-B14F-4D97-AF65-F5344CB8AC3E}">
-        <p14:creationId xmlns:p14="http://schemas.microsoft.com/office/powerpoint/2010/main" val="3333745403"/>
       </p:ext>
     </p:extLst>
   </p:cSld>
